--- a/(8.6) 시뮬레이터 추가.pptx
+++ b/(8.6) 시뮬레이터 추가.pptx
@@ -8,8 +8,8 @@
     <p:sldId id="257" r:id="rId2"/>
     <p:sldId id="258" r:id="rId3"/>
     <p:sldId id="259" r:id="rId4"/>
-    <p:sldId id="260" r:id="rId5"/>
-    <p:sldId id="261" r:id="rId6"/>
+    <p:sldId id="261" r:id="rId5"/>
+    <p:sldId id="260" r:id="rId6"/>
     <p:sldId id="262" r:id="rId7"/>
     <p:sldId id="263" r:id="rId8"/>
     <p:sldId id="264" r:id="rId9"/>
@@ -131,6 +131,57 @@
 </p:presentation>
 </file>
 
+<file path=ppt/revisionInfo.xml><?xml version="1.0" encoding="utf-8"?>
+<p1510:revInfo xmlns:a="http://schemas.openxmlformats.org/drawingml/2006/main" xmlns:r="http://schemas.openxmlformats.org/officeDocument/2006/relationships" xmlns:p1510="http://schemas.microsoft.com/office/powerpoint/2015/10/main">
+  <p1510:revLst>
+    <p1510:client id="{81DCD620-D8E2-4024-993F-37740BC838FD}" v="1" dt="2026-08-06T23:45:44.708"/>
+  </p1510:revLst>
+</p1510:revInfo>
+</file>
+
+<file path=ppt/changesInfos/changesInfo1.xml><?xml version="1.0" encoding="utf-8"?>
+<pc:chgInfo xmlns:a="http://schemas.openxmlformats.org/drawingml/2006/main" xmlns:r="http://schemas.openxmlformats.org/officeDocument/2006/relationships" xmlns:ac="http://schemas.microsoft.com/office/drawing/2013/main/command" xmlns:pc="http://schemas.microsoft.com/office/powerpoint/2013/main/command">
+  <pc:docChgLst>
+    <pc:chgData name="musukie52@gmail.com" userId="017bd91f96aa8751" providerId="LiveId" clId="{5B2C3894-F97E-4CAB-8812-5BB4D83AAC6A}"/>
+    <pc:docChg chg="undo custSel addSld delSld modSld sldOrd">
+      <pc:chgData name="musukie52@gmail.com" userId="017bd91f96aa8751" providerId="LiveId" clId="{5B2C3894-F97E-4CAB-8812-5BB4D83AAC6A}" dt="2026-08-09T02:11:50.716" v="11" actId="14100"/>
+      <pc:docMkLst>
+        <pc:docMk/>
+      </pc:docMkLst>
+      <pc:sldChg chg="add del ord">
+        <pc:chgData name="musukie52@gmail.com" userId="017bd91f96aa8751" providerId="LiveId" clId="{5B2C3894-F97E-4CAB-8812-5BB4D83AAC6A}" dt="2026-08-06T23:45:48.096" v="5"/>
+        <pc:sldMkLst>
+          <pc:docMk/>
+          <pc:sldMk cId="2276401015" sldId="257"/>
+        </pc:sldMkLst>
+      </pc:sldChg>
+      <pc:sldChg chg="add del ord">
+        <pc:chgData name="musukie52@gmail.com" userId="017bd91f96aa8751" providerId="LiveId" clId="{5B2C3894-F97E-4CAB-8812-5BB4D83AAC6A}" dt="2026-08-06T23:46:03.819" v="9"/>
+        <pc:sldMkLst>
+          <pc:docMk/>
+          <pc:sldMk cId="3334682513" sldId="260"/>
+        </pc:sldMkLst>
+      </pc:sldChg>
+      <pc:sldChg chg="modSp mod">
+        <pc:chgData name="musukie52@gmail.com" userId="017bd91f96aa8751" providerId="LiveId" clId="{5B2C3894-F97E-4CAB-8812-5BB4D83AAC6A}" dt="2026-08-09T02:11:50.716" v="11" actId="14100"/>
+        <pc:sldMkLst>
+          <pc:docMk/>
+          <pc:sldMk cId="191094722" sldId="265"/>
+        </pc:sldMkLst>
+        <pc:picChg chg="mod">
+          <ac:chgData name="musukie52@gmail.com" userId="017bd91f96aa8751" providerId="LiveId" clId="{5B2C3894-F97E-4CAB-8812-5BB4D83AAC6A}" dt="2026-08-09T02:11:50.716" v="11" actId="14100"/>
+          <ac:picMkLst>
+            <pc:docMk/>
+            <pc:sldMk cId="191094722" sldId="265"/>
+            <ac:picMk id="4" creationId="{00000000-0000-0000-0000-000000000000}"/>
+          </ac:picMkLst>
+        </pc:picChg>
+      </pc:sldChg>
+    </pc:docChg>
+  </pc:docChgLst>
+</pc:chgInfo>
+</file>
+
 <file path=ppt/slideLayouts/slideLayout1.xml><?xml version="1.0" encoding="utf-8"?>
 <p:sldLayout xmlns:a="http://schemas.openxmlformats.org/drawingml/2006/main" xmlns:r="http://schemas.openxmlformats.org/officeDocument/2006/relationships" xmlns:p="http://schemas.openxmlformats.org/presentationml/2006/main" type="title" preserve="1">
   <p:cSld name="제목 슬라이드">
@@ -173,10 +224,9 @@
           </a:lstStyle>
           <a:p>
             <a:r>
-              <a:rPr lang="ko-KR" altLang="en-US" smtClean="0"/>
+              <a:rPr lang="ko-KR" altLang="en-US"/>
               <a:t>마스터 제목 스타일 편집</a:t>
             </a:r>
-            <a:endParaRPr lang="ko-KR" altLang="en-US"/>
           </a:p>
         </p:txBody>
       </p:sp>
@@ -238,10 +288,9 @@
           </a:lstStyle>
           <a:p>
             <a:r>
-              <a:rPr lang="ko-KR" altLang="en-US" smtClean="0"/>
+              <a:rPr lang="ko-KR" altLang="en-US"/>
               <a:t>클릭하여 마스터 부제목 스타일 편집</a:t>
             </a:r>
-            <a:endParaRPr lang="ko-KR" altLang="en-US"/>
           </a:p>
         </p:txBody>
       </p:sp>
@@ -262,7 +311,7 @@
           <a:p>
             <a:fld id="{B208AD21-75DB-47FE-BC5B-5129809C90A3}" type="datetimeFigureOut">
               <a:rPr lang="ko-KR" altLang="en-US" smtClean="0"/>
-              <a:t>2026-08-06</a:t>
+              <a:t>2026-08-09</a:t>
             </a:fld>
             <a:endParaRPr lang="ko-KR" altLang="en-US"/>
           </a:p>
@@ -356,10 +405,9 @@
           <a:lstStyle/>
           <a:p>
             <a:r>
-              <a:rPr lang="ko-KR" altLang="en-US" smtClean="0"/>
+              <a:rPr lang="ko-KR" altLang="en-US"/>
               <a:t>마스터 제목 스타일 편집</a:t>
             </a:r>
-            <a:endParaRPr lang="ko-KR" altLang="en-US"/>
           </a:p>
         </p:txBody>
       </p:sp>
@@ -380,38 +428,37 @@
           <a:p>
             <a:pPr lvl="0"/>
             <a:r>
-              <a:rPr lang="ko-KR" altLang="en-US" smtClean="0"/>
+              <a:rPr lang="ko-KR" altLang="en-US"/>
               <a:t>마스터 텍스트 스타일 편집</a:t>
             </a:r>
           </a:p>
           <a:p>
             <a:pPr lvl="1"/>
             <a:r>
-              <a:rPr lang="ko-KR" altLang="en-US" smtClean="0"/>
+              <a:rPr lang="ko-KR" altLang="en-US"/>
               <a:t>둘째 수준</a:t>
             </a:r>
           </a:p>
           <a:p>
             <a:pPr lvl="2"/>
             <a:r>
-              <a:rPr lang="ko-KR" altLang="en-US" smtClean="0"/>
+              <a:rPr lang="ko-KR" altLang="en-US"/>
               <a:t>셋째 수준</a:t>
             </a:r>
           </a:p>
           <a:p>
             <a:pPr lvl="3"/>
             <a:r>
-              <a:rPr lang="ko-KR" altLang="en-US" smtClean="0"/>
+              <a:rPr lang="ko-KR" altLang="en-US"/>
               <a:t>넷째 수준</a:t>
             </a:r>
           </a:p>
           <a:p>
             <a:pPr lvl="4"/>
             <a:r>
-              <a:rPr lang="ko-KR" altLang="en-US" smtClean="0"/>
+              <a:rPr lang="ko-KR" altLang="en-US"/>
               <a:t>다섯째 수준</a:t>
             </a:r>
-            <a:endParaRPr lang="ko-KR" altLang="en-US"/>
           </a:p>
         </p:txBody>
       </p:sp>
@@ -432,7 +479,7 @@
           <a:p>
             <a:fld id="{B208AD21-75DB-47FE-BC5B-5129809C90A3}" type="datetimeFigureOut">
               <a:rPr lang="ko-KR" altLang="en-US" smtClean="0"/>
-              <a:t>2026-08-06</a:t>
+              <a:t>2026-08-09</a:t>
             </a:fld>
             <a:endParaRPr lang="ko-KR" altLang="en-US"/>
           </a:p>
@@ -531,10 +578,9 @@
           <a:lstStyle/>
           <a:p>
             <a:r>
-              <a:rPr lang="ko-KR" altLang="en-US" smtClean="0"/>
+              <a:rPr lang="ko-KR" altLang="en-US"/>
               <a:t>마스터 제목 스타일 편집</a:t>
             </a:r>
-            <a:endParaRPr lang="ko-KR" altLang="en-US"/>
           </a:p>
         </p:txBody>
       </p:sp>
@@ -560,38 +606,37 @@
           <a:p>
             <a:pPr lvl="0"/>
             <a:r>
-              <a:rPr lang="ko-KR" altLang="en-US" smtClean="0"/>
+              <a:rPr lang="ko-KR" altLang="en-US"/>
               <a:t>마스터 텍스트 스타일 편집</a:t>
             </a:r>
           </a:p>
           <a:p>
             <a:pPr lvl="1"/>
             <a:r>
-              <a:rPr lang="ko-KR" altLang="en-US" smtClean="0"/>
+              <a:rPr lang="ko-KR" altLang="en-US"/>
               <a:t>둘째 수준</a:t>
             </a:r>
           </a:p>
           <a:p>
             <a:pPr lvl="2"/>
             <a:r>
-              <a:rPr lang="ko-KR" altLang="en-US" smtClean="0"/>
+              <a:rPr lang="ko-KR" altLang="en-US"/>
               <a:t>셋째 수준</a:t>
             </a:r>
           </a:p>
           <a:p>
             <a:pPr lvl="3"/>
             <a:r>
-              <a:rPr lang="ko-KR" altLang="en-US" smtClean="0"/>
+              <a:rPr lang="ko-KR" altLang="en-US"/>
               <a:t>넷째 수준</a:t>
             </a:r>
           </a:p>
           <a:p>
             <a:pPr lvl="4"/>
             <a:r>
-              <a:rPr lang="ko-KR" altLang="en-US" smtClean="0"/>
+              <a:rPr lang="ko-KR" altLang="en-US"/>
               <a:t>다섯째 수준</a:t>
             </a:r>
-            <a:endParaRPr lang="ko-KR" altLang="en-US"/>
           </a:p>
         </p:txBody>
       </p:sp>
@@ -612,7 +657,7 @@
           <a:p>
             <a:fld id="{B208AD21-75DB-47FE-BC5B-5129809C90A3}" type="datetimeFigureOut">
               <a:rPr lang="ko-KR" altLang="en-US" smtClean="0"/>
-              <a:t>2026-08-06</a:t>
+              <a:t>2026-08-09</a:t>
             </a:fld>
             <a:endParaRPr lang="ko-KR" altLang="en-US"/>
           </a:p>
@@ -706,10 +751,9 @@
           <a:lstStyle/>
           <a:p>
             <a:r>
-              <a:rPr lang="ko-KR" altLang="en-US" smtClean="0"/>
+              <a:rPr lang="ko-KR" altLang="en-US"/>
               <a:t>마스터 제목 스타일 편집</a:t>
             </a:r>
-            <a:endParaRPr lang="ko-KR" altLang="en-US"/>
           </a:p>
         </p:txBody>
       </p:sp>
@@ -730,38 +774,37 @@
           <a:p>
             <a:pPr lvl="0"/>
             <a:r>
-              <a:rPr lang="ko-KR" altLang="en-US" smtClean="0"/>
+              <a:rPr lang="ko-KR" altLang="en-US"/>
               <a:t>마스터 텍스트 스타일 편집</a:t>
             </a:r>
           </a:p>
           <a:p>
             <a:pPr lvl="1"/>
             <a:r>
-              <a:rPr lang="ko-KR" altLang="en-US" smtClean="0"/>
+              <a:rPr lang="ko-KR" altLang="en-US"/>
               <a:t>둘째 수준</a:t>
             </a:r>
           </a:p>
           <a:p>
             <a:pPr lvl="2"/>
             <a:r>
-              <a:rPr lang="ko-KR" altLang="en-US" smtClean="0"/>
+              <a:rPr lang="ko-KR" altLang="en-US"/>
               <a:t>셋째 수준</a:t>
             </a:r>
           </a:p>
           <a:p>
             <a:pPr lvl="3"/>
             <a:r>
-              <a:rPr lang="ko-KR" altLang="en-US" smtClean="0"/>
+              <a:rPr lang="ko-KR" altLang="en-US"/>
               <a:t>넷째 수준</a:t>
             </a:r>
           </a:p>
           <a:p>
             <a:pPr lvl="4"/>
             <a:r>
-              <a:rPr lang="ko-KR" altLang="en-US" smtClean="0"/>
+              <a:rPr lang="ko-KR" altLang="en-US"/>
               <a:t>다섯째 수준</a:t>
             </a:r>
-            <a:endParaRPr lang="ko-KR" altLang="en-US"/>
           </a:p>
         </p:txBody>
       </p:sp>
@@ -782,7 +825,7 @@
           <a:p>
             <a:fld id="{B208AD21-75DB-47FE-BC5B-5129809C90A3}" type="datetimeFigureOut">
               <a:rPr lang="ko-KR" altLang="en-US" smtClean="0"/>
-              <a:t>2026-08-06</a:t>
+              <a:t>2026-08-09</a:t>
             </a:fld>
             <a:endParaRPr lang="ko-KR" altLang="en-US"/>
           </a:p>
@@ -885,10 +928,9 @@
           </a:lstStyle>
           <a:p>
             <a:r>
-              <a:rPr lang="ko-KR" altLang="en-US" smtClean="0"/>
+              <a:rPr lang="ko-KR" altLang="en-US"/>
               <a:t>마스터 제목 스타일 편집</a:t>
             </a:r>
-            <a:endParaRPr lang="ko-KR" altLang="en-US"/>
           </a:p>
         </p:txBody>
       </p:sp>
@@ -1005,7 +1047,7 @@
           <a:p>
             <a:pPr lvl="0"/>
             <a:r>
-              <a:rPr lang="ko-KR" altLang="en-US" smtClean="0"/>
+              <a:rPr lang="ko-KR" altLang="en-US"/>
               <a:t>마스터 텍스트 스타일 편집</a:t>
             </a:r>
           </a:p>
@@ -1028,7 +1070,7 @@
           <a:p>
             <a:fld id="{B208AD21-75DB-47FE-BC5B-5129809C90A3}" type="datetimeFigureOut">
               <a:rPr lang="ko-KR" altLang="en-US" smtClean="0"/>
-              <a:t>2026-08-06</a:t>
+              <a:t>2026-08-09</a:t>
             </a:fld>
             <a:endParaRPr lang="ko-KR" altLang="en-US"/>
           </a:p>
@@ -1122,10 +1164,9 @@
           <a:lstStyle/>
           <a:p>
             <a:r>
-              <a:rPr lang="ko-KR" altLang="en-US" smtClean="0"/>
+              <a:rPr lang="ko-KR" altLang="en-US"/>
               <a:t>마스터 제목 스타일 편집</a:t>
             </a:r>
-            <a:endParaRPr lang="ko-KR" altLang="en-US"/>
           </a:p>
         </p:txBody>
       </p:sp>
@@ -1151,38 +1192,37 @@
           <a:p>
             <a:pPr lvl="0"/>
             <a:r>
-              <a:rPr lang="ko-KR" altLang="en-US" smtClean="0"/>
+              <a:rPr lang="ko-KR" altLang="en-US"/>
               <a:t>마스터 텍스트 스타일 편집</a:t>
             </a:r>
           </a:p>
           <a:p>
             <a:pPr lvl="1"/>
             <a:r>
-              <a:rPr lang="ko-KR" altLang="en-US" smtClean="0"/>
+              <a:rPr lang="ko-KR" altLang="en-US"/>
               <a:t>둘째 수준</a:t>
             </a:r>
           </a:p>
           <a:p>
             <a:pPr lvl="2"/>
             <a:r>
-              <a:rPr lang="ko-KR" altLang="en-US" smtClean="0"/>
+              <a:rPr lang="ko-KR" altLang="en-US"/>
               <a:t>셋째 수준</a:t>
             </a:r>
           </a:p>
           <a:p>
             <a:pPr lvl="3"/>
             <a:r>
-              <a:rPr lang="ko-KR" altLang="en-US" smtClean="0"/>
+              <a:rPr lang="ko-KR" altLang="en-US"/>
               <a:t>넷째 수준</a:t>
             </a:r>
           </a:p>
           <a:p>
             <a:pPr lvl="4"/>
             <a:r>
-              <a:rPr lang="ko-KR" altLang="en-US" smtClean="0"/>
+              <a:rPr lang="ko-KR" altLang="en-US"/>
               <a:t>다섯째 수준</a:t>
             </a:r>
-            <a:endParaRPr lang="ko-KR" altLang="en-US"/>
           </a:p>
         </p:txBody>
       </p:sp>
@@ -1208,38 +1248,37 @@
           <a:p>
             <a:pPr lvl="0"/>
             <a:r>
-              <a:rPr lang="ko-KR" altLang="en-US" smtClean="0"/>
+              <a:rPr lang="ko-KR" altLang="en-US"/>
               <a:t>마스터 텍스트 스타일 편집</a:t>
             </a:r>
           </a:p>
           <a:p>
             <a:pPr lvl="1"/>
             <a:r>
-              <a:rPr lang="ko-KR" altLang="en-US" smtClean="0"/>
+              <a:rPr lang="ko-KR" altLang="en-US"/>
               <a:t>둘째 수준</a:t>
             </a:r>
           </a:p>
           <a:p>
             <a:pPr lvl="2"/>
             <a:r>
-              <a:rPr lang="ko-KR" altLang="en-US" smtClean="0"/>
+              <a:rPr lang="ko-KR" altLang="en-US"/>
               <a:t>셋째 수준</a:t>
             </a:r>
           </a:p>
           <a:p>
             <a:pPr lvl="3"/>
             <a:r>
-              <a:rPr lang="ko-KR" altLang="en-US" smtClean="0"/>
+              <a:rPr lang="ko-KR" altLang="en-US"/>
               <a:t>넷째 수준</a:t>
             </a:r>
           </a:p>
           <a:p>
             <a:pPr lvl="4"/>
             <a:r>
-              <a:rPr lang="ko-KR" altLang="en-US" smtClean="0"/>
+              <a:rPr lang="ko-KR" altLang="en-US"/>
               <a:t>다섯째 수준</a:t>
             </a:r>
-            <a:endParaRPr lang="ko-KR" altLang="en-US"/>
           </a:p>
         </p:txBody>
       </p:sp>
@@ -1260,7 +1299,7 @@
           <a:p>
             <a:fld id="{B208AD21-75DB-47FE-BC5B-5129809C90A3}" type="datetimeFigureOut">
               <a:rPr lang="ko-KR" altLang="en-US" smtClean="0"/>
-              <a:t>2026-08-06</a:t>
+              <a:t>2026-08-09</a:t>
             </a:fld>
             <a:endParaRPr lang="ko-KR" altLang="en-US"/>
           </a:p>
@@ -1359,10 +1398,9 @@
           <a:lstStyle/>
           <a:p>
             <a:r>
-              <a:rPr lang="ko-KR" altLang="en-US" smtClean="0"/>
+              <a:rPr lang="ko-KR" altLang="en-US"/>
               <a:t>마스터 제목 스타일 편집</a:t>
             </a:r>
-            <a:endParaRPr lang="ko-KR" altLang="en-US"/>
           </a:p>
         </p:txBody>
       </p:sp>
@@ -1425,7 +1463,7 @@
           <a:p>
             <a:pPr lvl="0"/>
             <a:r>
-              <a:rPr lang="ko-KR" altLang="en-US" smtClean="0"/>
+              <a:rPr lang="ko-KR" altLang="en-US"/>
               <a:t>마스터 텍스트 스타일 편집</a:t>
             </a:r>
           </a:p>
@@ -1453,38 +1491,37 @@
           <a:p>
             <a:pPr lvl="0"/>
             <a:r>
-              <a:rPr lang="ko-KR" altLang="en-US" smtClean="0"/>
+              <a:rPr lang="ko-KR" altLang="en-US"/>
               <a:t>마스터 텍스트 스타일 편집</a:t>
             </a:r>
           </a:p>
           <a:p>
             <a:pPr lvl="1"/>
             <a:r>
-              <a:rPr lang="ko-KR" altLang="en-US" smtClean="0"/>
+              <a:rPr lang="ko-KR" altLang="en-US"/>
               <a:t>둘째 수준</a:t>
             </a:r>
           </a:p>
           <a:p>
             <a:pPr lvl="2"/>
             <a:r>
-              <a:rPr lang="ko-KR" altLang="en-US" smtClean="0"/>
+              <a:rPr lang="ko-KR" altLang="en-US"/>
               <a:t>셋째 수준</a:t>
             </a:r>
           </a:p>
           <a:p>
             <a:pPr lvl="3"/>
             <a:r>
-              <a:rPr lang="ko-KR" altLang="en-US" smtClean="0"/>
+              <a:rPr lang="ko-KR" altLang="en-US"/>
               <a:t>넷째 수준</a:t>
             </a:r>
           </a:p>
           <a:p>
             <a:pPr lvl="4"/>
             <a:r>
-              <a:rPr lang="ko-KR" altLang="en-US" smtClean="0"/>
+              <a:rPr lang="ko-KR" altLang="en-US"/>
               <a:t>다섯째 수준</a:t>
             </a:r>
-            <a:endParaRPr lang="ko-KR" altLang="en-US"/>
           </a:p>
         </p:txBody>
       </p:sp>
@@ -1547,7 +1584,7 @@
           <a:p>
             <a:pPr lvl="0"/>
             <a:r>
-              <a:rPr lang="ko-KR" altLang="en-US" smtClean="0"/>
+              <a:rPr lang="ko-KR" altLang="en-US"/>
               <a:t>마스터 텍스트 스타일 편집</a:t>
             </a:r>
           </a:p>
@@ -1575,38 +1612,37 @@
           <a:p>
             <a:pPr lvl="0"/>
             <a:r>
-              <a:rPr lang="ko-KR" altLang="en-US" smtClean="0"/>
+              <a:rPr lang="ko-KR" altLang="en-US"/>
               <a:t>마스터 텍스트 스타일 편집</a:t>
             </a:r>
           </a:p>
           <a:p>
             <a:pPr lvl="1"/>
             <a:r>
-              <a:rPr lang="ko-KR" altLang="en-US" smtClean="0"/>
+              <a:rPr lang="ko-KR" altLang="en-US"/>
               <a:t>둘째 수준</a:t>
             </a:r>
           </a:p>
           <a:p>
             <a:pPr lvl="2"/>
             <a:r>
-              <a:rPr lang="ko-KR" altLang="en-US" smtClean="0"/>
+              <a:rPr lang="ko-KR" altLang="en-US"/>
               <a:t>셋째 수준</a:t>
             </a:r>
           </a:p>
           <a:p>
             <a:pPr lvl="3"/>
             <a:r>
-              <a:rPr lang="ko-KR" altLang="en-US" smtClean="0"/>
+              <a:rPr lang="ko-KR" altLang="en-US"/>
               <a:t>넷째 수준</a:t>
             </a:r>
           </a:p>
           <a:p>
             <a:pPr lvl="4"/>
             <a:r>
-              <a:rPr lang="ko-KR" altLang="en-US" smtClean="0"/>
+              <a:rPr lang="ko-KR" altLang="en-US"/>
               <a:t>다섯째 수준</a:t>
             </a:r>
-            <a:endParaRPr lang="ko-KR" altLang="en-US"/>
           </a:p>
         </p:txBody>
       </p:sp>
@@ -1627,7 +1663,7 @@
           <a:p>
             <a:fld id="{B208AD21-75DB-47FE-BC5B-5129809C90A3}" type="datetimeFigureOut">
               <a:rPr lang="ko-KR" altLang="en-US" smtClean="0"/>
-              <a:t>2026-08-06</a:t>
+              <a:t>2026-08-09</a:t>
             </a:fld>
             <a:endParaRPr lang="ko-KR" altLang="en-US"/>
           </a:p>
@@ -1721,10 +1757,9 @@
           <a:lstStyle/>
           <a:p>
             <a:r>
-              <a:rPr lang="ko-KR" altLang="en-US" smtClean="0"/>
+              <a:rPr lang="ko-KR" altLang="en-US"/>
               <a:t>마스터 제목 스타일 편집</a:t>
             </a:r>
-            <a:endParaRPr lang="ko-KR" altLang="en-US"/>
           </a:p>
         </p:txBody>
       </p:sp>
@@ -1745,7 +1780,7 @@
           <a:p>
             <a:fld id="{B208AD21-75DB-47FE-BC5B-5129809C90A3}" type="datetimeFigureOut">
               <a:rPr lang="ko-KR" altLang="en-US" smtClean="0"/>
-              <a:t>2026-08-06</a:t>
+              <a:t>2026-08-09</a:t>
             </a:fld>
             <a:endParaRPr lang="ko-KR" altLang="en-US"/>
           </a:p>
@@ -1840,7 +1875,7 @@
           <a:p>
             <a:fld id="{B208AD21-75DB-47FE-BC5B-5129809C90A3}" type="datetimeFigureOut">
               <a:rPr lang="ko-KR" altLang="en-US" smtClean="0"/>
-              <a:t>2026-08-06</a:t>
+              <a:t>2026-08-09</a:t>
             </a:fld>
             <a:endParaRPr lang="ko-KR" altLang="en-US"/>
           </a:p>
@@ -1943,10 +1978,9 @@
           </a:lstStyle>
           <a:p>
             <a:r>
-              <a:rPr lang="ko-KR" altLang="en-US" smtClean="0"/>
+              <a:rPr lang="ko-KR" altLang="en-US"/>
               <a:t>마스터 제목 스타일 편집</a:t>
             </a:r>
-            <a:endParaRPr lang="ko-KR" altLang="en-US"/>
           </a:p>
         </p:txBody>
       </p:sp>
@@ -2000,38 +2034,37 @@
           <a:p>
             <a:pPr lvl="0"/>
             <a:r>
-              <a:rPr lang="ko-KR" altLang="en-US" smtClean="0"/>
+              <a:rPr lang="ko-KR" altLang="en-US"/>
               <a:t>마스터 텍스트 스타일 편집</a:t>
             </a:r>
           </a:p>
           <a:p>
             <a:pPr lvl="1"/>
             <a:r>
-              <a:rPr lang="ko-KR" altLang="en-US" smtClean="0"/>
+              <a:rPr lang="ko-KR" altLang="en-US"/>
               <a:t>둘째 수준</a:t>
             </a:r>
           </a:p>
           <a:p>
             <a:pPr lvl="2"/>
             <a:r>
-              <a:rPr lang="ko-KR" altLang="en-US" smtClean="0"/>
+              <a:rPr lang="ko-KR" altLang="en-US"/>
               <a:t>셋째 수준</a:t>
             </a:r>
           </a:p>
           <a:p>
             <a:pPr lvl="3"/>
             <a:r>
-              <a:rPr lang="ko-KR" altLang="en-US" smtClean="0"/>
+              <a:rPr lang="ko-KR" altLang="en-US"/>
               <a:t>넷째 수준</a:t>
             </a:r>
           </a:p>
           <a:p>
             <a:pPr lvl="4"/>
             <a:r>
-              <a:rPr lang="ko-KR" altLang="en-US" smtClean="0"/>
+              <a:rPr lang="ko-KR" altLang="en-US"/>
               <a:t>다섯째 수준</a:t>
             </a:r>
-            <a:endParaRPr lang="ko-KR" altLang="en-US"/>
           </a:p>
         </p:txBody>
       </p:sp>
@@ -2094,7 +2127,7 @@
           <a:p>
             <a:pPr lvl="0"/>
             <a:r>
-              <a:rPr lang="ko-KR" altLang="en-US" smtClean="0"/>
+              <a:rPr lang="ko-KR" altLang="en-US"/>
               <a:t>마스터 텍스트 스타일 편집</a:t>
             </a:r>
           </a:p>
@@ -2117,7 +2150,7 @@
           <a:p>
             <a:fld id="{B208AD21-75DB-47FE-BC5B-5129809C90A3}" type="datetimeFigureOut">
               <a:rPr lang="ko-KR" altLang="en-US" smtClean="0"/>
-              <a:t>2026-08-06</a:t>
+              <a:t>2026-08-09</a:t>
             </a:fld>
             <a:endParaRPr lang="ko-KR" altLang="en-US"/>
           </a:p>
@@ -2220,10 +2253,9 @@
           </a:lstStyle>
           <a:p>
             <a:r>
-              <a:rPr lang="ko-KR" altLang="en-US" smtClean="0"/>
+              <a:rPr lang="ko-KR" altLang="en-US"/>
               <a:t>마스터 제목 스타일 편집</a:t>
             </a:r>
-            <a:endParaRPr lang="ko-KR" altLang="en-US"/>
           </a:p>
         </p:txBody>
       </p:sp>
@@ -2347,7 +2379,7 @@
           <a:p>
             <a:pPr lvl="0"/>
             <a:r>
-              <a:rPr lang="ko-KR" altLang="en-US" smtClean="0"/>
+              <a:rPr lang="ko-KR" altLang="en-US"/>
               <a:t>마스터 텍스트 스타일 편집</a:t>
             </a:r>
           </a:p>
@@ -2370,7 +2402,7 @@
           <a:p>
             <a:fld id="{B208AD21-75DB-47FE-BC5B-5129809C90A3}" type="datetimeFigureOut">
               <a:rPr lang="ko-KR" altLang="en-US" smtClean="0"/>
-              <a:t>2026-08-06</a:t>
+              <a:t>2026-08-09</a:t>
             </a:fld>
             <a:endParaRPr lang="ko-KR" altLang="en-US"/>
           </a:p>
@@ -2479,10 +2511,9 @@
           <a:lstStyle/>
           <a:p>
             <a:r>
-              <a:rPr lang="ko-KR" altLang="en-US" smtClean="0"/>
+              <a:rPr lang="ko-KR" altLang="en-US"/>
               <a:t>마스터 제목 스타일 편집</a:t>
             </a:r>
-            <a:endParaRPr lang="ko-KR" altLang="en-US"/>
           </a:p>
         </p:txBody>
       </p:sp>
@@ -2513,38 +2544,37 @@
           <a:p>
             <a:pPr lvl="0"/>
             <a:r>
-              <a:rPr lang="ko-KR" altLang="en-US" smtClean="0"/>
+              <a:rPr lang="ko-KR" altLang="en-US"/>
               <a:t>마스터 텍스트 스타일 편집</a:t>
             </a:r>
           </a:p>
           <a:p>
             <a:pPr lvl="1"/>
             <a:r>
-              <a:rPr lang="ko-KR" altLang="en-US" smtClean="0"/>
+              <a:rPr lang="ko-KR" altLang="en-US"/>
               <a:t>둘째 수준</a:t>
             </a:r>
           </a:p>
           <a:p>
             <a:pPr lvl="2"/>
             <a:r>
-              <a:rPr lang="ko-KR" altLang="en-US" smtClean="0"/>
+              <a:rPr lang="ko-KR" altLang="en-US"/>
               <a:t>셋째 수준</a:t>
             </a:r>
           </a:p>
           <a:p>
             <a:pPr lvl="3"/>
             <a:r>
-              <a:rPr lang="ko-KR" altLang="en-US" smtClean="0"/>
+              <a:rPr lang="ko-KR" altLang="en-US"/>
               <a:t>넷째 수준</a:t>
             </a:r>
           </a:p>
           <a:p>
             <a:pPr lvl="4"/>
             <a:r>
-              <a:rPr lang="ko-KR" altLang="en-US" smtClean="0"/>
+              <a:rPr lang="ko-KR" altLang="en-US"/>
               <a:t>다섯째 수준</a:t>
             </a:r>
-            <a:endParaRPr lang="ko-KR" altLang="en-US"/>
           </a:p>
         </p:txBody>
       </p:sp>
@@ -2583,7 +2613,7 @@
           <a:p>
             <a:fld id="{B208AD21-75DB-47FE-BC5B-5129809C90A3}" type="datetimeFigureOut">
               <a:rPr lang="ko-KR" altLang="en-US" smtClean="0"/>
-              <a:t>2026-08-06</a:t>
+              <a:t>2026-08-09</a:t>
             </a:fld>
             <a:endParaRPr lang="ko-KR" altLang="en-US"/>
           </a:p>
@@ -3076,13 +3106,6 @@
   <p:clrMapOvr>
     <a:masterClrMapping/>
   </p:clrMapOvr>
-  <p:timing>
-    <p:tnLst>
-      <p:par>
-        <p:cTn id="1" dur="indefinite" restart="never" nodeType="tmRoot"/>
-      </p:par>
-    </p:tnLst>
-  </p:timing>
 </p:sld>
 </file>
 
@@ -3119,10 +3142,9 @@
           <a:lstStyle/>
           <a:p>
             <a:r>
-              <a:rPr lang="ko-KR" altLang="en-US" smtClean="0"/>
+              <a:rPr lang="ko-KR" altLang="en-US"/>
               <a:t>시뮬레이터</a:t>
             </a:r>
-            <a:endParaRPr lang="ko-KR" altLang="en-US"/>
           </a:p>
         </p:txBody>
       </p:sp>
@@ -3142,111 +3164,111 @@
           <a:lstStyle/>
           <a:p>
             <a:r>
-              <a:rPr lang="en-US" altLang="ko-KR" smtClean="0"/>
+              <a:rPr lang="en-US" altLang="ko-KR"/>
               <a:t>(</a:t>
             </a:r>
             <a:r>
-              <a:rPr lang="ko-KR" altLang="en-US" smtClean="0"/>
+              <a:rPr lang="ko-KR" altLang="en-US"/>
               <a:t>밸런스</a:t>
             </a:r>
             <a:r>
-              <a:rPr lang="en-US" altLang="ko-KR" smtClean="0"/>
+              <a:rPr lang="en-US" altLang="ko-KR"/>
               <a:t>)</a:t>
             </a:r>
             <a:r>
-              <a:rPr lang="ko-KR" altLang="en-US" smtClean="0"/>
+              <a:rPr lang="ko-KR" altLang="en-US"/>
               <a:t>시뮬레이터</a:t>
             </a:r>
             <a:r>
-              <a:rPr lang="en-US" altLang="ko-KR" smtClean="0"/>
+              <a:rPr lang="en-US" altLang="ko-KR"/>
               <a:t>(</a:t>
             </a:r>
             <a:r>
-              <a:rPr lang="ko-KR" altLang="en-US" smtClean="0"/>
+              <a:rPr lang="ko-KR" altLang="en-US"/>
               <a:t>모의 전투</a:t>
             </a:r>
             <a:r>
-              <a:rPr lang="en-US" altLang="ko-KR" smtClean="0"/>
+              <a:rPr lang="en-US" altLang="ko-KR"/>
               <a:t>)</a:t>
             </a:r>
             <a:r>
-              <a:rPr lang="ko-KR" altLang="en-US" smtClean="0"/>
+              <a:rPr lang="ko-KR" altLang="en-US"/>
               <a:t>라는 이름의 시트를 만든다</a:t>
             </a:r>
             <a:r>
-              <a:rPr lang="en-US" altLang="ko-KR" smtClean="0"/>
+              <a:rPr lang="en-US" altLang="ko-KR"/>
               <a:t>.</a:t>
             </a:r>
           </a:p>
           <a:p>
             <a:r>
-              <a:rPr lang="ko-KR" altLang="en-US" smtClean="0"/>
+              <a:rPr lang="ko-KR" altLang="en-US"/>
               <a:t>수식 </a:t>
             </a:r>
             <a:r>
-              <a:rPr lang="en-US" altLang="ko-KR" smtClean="0"/>
+              <a:rPr lang="en-US" altLang="ko-KR"/>
               <a:t>-&gt; </a:t>
             </a:r>
             <a:r>
-              <a:rPr lang="ko-KR" altLang="en-US" smtClean="0"/>
+              <a:rPr lang="ko-KR" altLang="en-US"/>
               <a:t>정의된 이름 </a:t>
             </a:r>
             <a:r>
-              <a:rPr lang="en-US" altLang="ko-KR" smtClean="0"/>
+              <a:rPr lang="en-US" altLang="ko-KR"/>
               <a:t>-&gt; </a:t>
             </a:r>
             <a:r>
-              <a:rPr lang="ko-KR" altLang="en-US" smtClean="0"/>
+              <a:rPr lang="ko-KR" altLang="en-US"/>
               <a:t>이름관리자</a:t>
             </a:r>
-            <a:endParaRPr lang="en-US" altLang="ko-KR" smtClean="0"/>
+            <a:endParaRPr lang="en-US" altLang="ko-KR"/>
           </a:p>
           <a:p>
             <a:pPr lvl="1"/>
             <a:r>
-              <a:rPr lang="ko-KR" altLang="en-US" smtClean="0"/>
+              <a:rPr lang="ko-KR" altLang="en-US"/>
               <a:t>몬스터</a:t>
             </a:r>
             <a:r>
-              <a:rPr lang="en-US" altLang="ko-KR" smtClean="0"/>
+              <a:rPr lang="en-US" altLang="ko-KR"/>
               <a:t>_</a:t>
             </a:r>
             <a:r>
-              <a:rPr lang="ko-KR" altLang="en-US" smtClean="0"/>
+              <a:rPr lang="ko-KR" altLang="en-US"/>
               <a:t>이름</a:t>
             </a:r>
-            <a:endParaRPr lang="en-US" altLang="ko-KR" smtClean="0"/>
+            <a:endParaRPr lang="en-US" altLang="ko-KR"/>
           </a:p>
           <a:p>
             <a:pPr lvl="1"/>
             <a:r>
-              <a:rPr lang="ko-KR" altLang="en-US" smtClean="0"/>
+              <a:rPr lang="ko-KR" altLang="en-US"/>
               <a:t>몬스터</a:t>
             </a:r>
             <a:r>
-              <a:rPr lang="en-US" altLang="ko-KR" smtClean="0"/>
+              <a:rPr lang="en-US" altLang="ko-KR"/>
               <a:t>_</a:t>
             </a:r>
             <a:r>
-              <a:rPr lang="ko-KR" altLang="en-US" smtClean="0"/>
+              <a:rPr lang="ko-KR" altLang="en-US"/>
               <a:t>이미지</a:t>
             </a:r>
-            <a:endParaRPr lang="en-US" altLang="ko-KR" smtClean="0"/>
-          </a:p>
-          <a:p>
-            <a:r>
-              <a:rPr lang="ko-KR" altLang="en-US" smtClean="0"/>
+            <a:endParaRPr lang="en-US" altLang="ko-KR"/>
+          </a:p>
+          <a:p>
+            <a:r>
+              <a:rPr lang="ko-KR" altLang="en-US"/>
               <a:t>데이터 </a:t>
             </a:r>
             <a:r>
-              <a:rPr lang="en-US" altLang="ko-KR" smtClean="0"/>
+              <a:rPr lang="en-US" altLang="ko-KR"/>
               <a:t>-&gt; </a:t>
             </a:r>
             <a:r>
-              <a:rPr lang="ko-KR" altLang="en-US" smtClean="0"/>
+              <a:rPr lang="ko-KR" altLang="en-US"/>
               <a:t>데이터 유효성 검사</a:t>
             </a:r>
-            <a:endParaRPr lang="en-US" altLang="ko-KR" smtClean="0"/>
+            <a:endParaRPr lang="en-US" altLang="ko-KR"/>
           </a:p>
           <a:p>
             <a:endParaRPr lang="ko-KR" altLang="en-US"/>
@@ -3311,17 +3333,143 @@
   <p:clrMapOvr>
     <a:masterClrMapping/>
   </p:clrMapOvr>
-  <p:timing>
-    <p:tnLst>
-      <p:par>
-        <p:cTn id="1" dur="indefinite" restart="never" nodeType="tmRoot"/>
-      </p:par>
-    </p:tnLst>
-  </p:timing>
 </p:sld>
 </file>
 
 <file path=ppt/slides/slide4.xml><?xml version="1.0" encoding="utf-8"?>
+<p:sld xmlns:a="http://schemas.openxmlformats.org/drawingml/2006/main" xmlns:r="http://schemas.openxmlformats.org/officeDocument/2006/relationships" xmlns:p="http://schemas.openxmlformats.org/presentationml/2006/main">
+  <p:cSld>
+    <p:spTree>
+      <p:nvGrpSpPr>
+        <p:cNvPr id="1" name=""/>
+        <p:cNvGrpSpPr/>
+        <p:nvPr/>
+      </p:nvGrpSpPr>
+      <p:grpSpPr>
+        <a:xfrm>
+          <a:off x="0" y="0"/>
+          <a:ext cx="0" cy="0"/>
+          <a:chOff x="0" y="0"/>
+          <a:chExt cx="0" cy="0"/>
+        </a:xfrm>
+      </p:grpSpPr>
+      <p:sp>
+        <p:nvSpPr>
+          <p:cNvPr id="2" name="제목 1"/>
+          <p:cNvSpPr>
+            <a:spLocks noGrp="1"/>
+          </p:cNvSpPr>
+          <p:nvPr>
+            <p:ph type="title"/>
+          </p:nvPr>
+        </p:nvSpPr>
+        <p:spPr/>
+        <p:txBody>
+          <a:bodyPr/>
+          <a:lstStyle/>
+          <a:p>
+            <a:r>
+              <a:rPr lang="ko-KR" altLang="en-US"/>
+              <a:t>시뮬레이터</a:t>
+            </a:r>
+          </a:p>
+        </p:txBody>
+      </p:sp>
+      <p:sp>
+        <p:nvSpPr>
+          <p:cNvPr id="3" name="내용 개체 틀 2"/>
+          <p:cNvSpPr>
+            <a:spLocks noGrp="1"/>
+          </p:cNvSpPr>
+          <p:nvPr>
+            <p:ph idx="1"/>
+          </p:nvPr>
+        </p:nvSpPr>
+        <p:spPr/>
+        <p:txBody>
+          <a:bodyPr/>
+          <a:lstStyle/>
+          <a:p>
+            <a:r>
+              <a:rPr lang="en-US" altLang="ko-KR"/>
+              <a:t>‘</a:t>
+            </a:r>
+            <a:r>
+              <a:rPr lang="ko-KR" altLang="en-US"/>
+              <a:t>몬스터 가져오기</a:t>
+            </a:r>
+            <a:r>
+              <a:rPr lang="en-US" altLang="ko-KR"/>
+              <a:t>’ </a:t>
+            </a:r>
+            <a:r>
+              <a:rPr lang="ko-KR" altLang="en-US"/>
+              <a:t>이름 관리자 추가</a:t>
+            </a:r>
+            <a:endParaRPr lang="en-US" altLang="ko-KR"/>
+          </a:p>
+          <a:p>
+            <a:r>
+              <a:rPr lang="en-US" altLang="ko-KR"/>
+              <a:t>INDEX</a:t>
+            </a:r>
+            <a:r>
+              <a:rPr lang="ko-KR" altLang="en-US"/>
+              <a:t>와 </a:t>
+            </a:r>
+            <a:r>
+              <a:rPr lang="en-US" altLang="ko-KR"/>
+              <a:t>MATCH </a:t>
+            </a:r>
+            <a:r>
+              <a:rPr lang="ko-KR" altLang="en-US"/>
+              <a:t>함수 사용</a:t>
+            </a:r>
+            <a:endParaRPr lang="en-US" altLang="ko-KR"/>
+          </a:p>
+          <a:p>
+            <a:endParaRPr lang="ko-KR" altLang="en-US"/>
+          </a:p>
+        </p:txBody>
+      </p:sp>
+      <p:pic>
+        <p:nvPicPr>
+          <p:cNvPr id="4" name="그림 3"/>
+          <p:cNvPicPr>
+            <a:picLocks noChangeAspect="1"/>
+          </p:cNvPicPr>
+          <p:nvPr/>
+        </p:nvPicPr>
+        <p:blipFill>
+          <a:blip r:embed="rId2"/>
+          <a:stretch>
+            <a:fillRect/>
+          </a:stretch>
+        </p:blipFill>
+        <p:spPr>
+          <a:xfrm>
+            <a:off x="5409253" y="3323732"/>
+            <a:ext cx="6782747" cy="3534268"/>
+          </a:xfrm>
+          <a:prstGeom prst="rect">
+            <a:avLst/>
+          </a:prstGeom>
+        </p:spPr>
+      </p:pic>
+    </p:spTree>
+    <p:extLst>
+      <p:ext uri="{BB962C8B-B14F-4D97-AF65-F5344CB8AC3E}">
+        <p14:creationId xmlns:p14="http://schemas.microsoft.com/office/powerpoint/2010/main" val="454332977"/>
+      </p:ext>
+    </p:extLst>
+  </p:cSld>
+  <p:clrMapOvr>
+    <a:masterClrMapping/>
+  </p:clrMapOvr>
+</p:sld>
+</file>
+
+<file path=ppt/slides/slide5.xml><?xml version="1.0" encoding="utf-8"?>
 <p:sld xmlns:a="http://schemas.openxmlformats.org/drawingml/2006/main" xmlns:r="http://schemas.openxmlformats.org/officeDocument/2006/relationships" xmlns:p="http://schemas.openxmlformats.org/presentationml/2006/main">
   <p:cSld>
     <p:spTree>
@@ -3372,154 +3520,6 @@
   <p:clrMapOvr>
     <a:masterClrMapping/>
   </p:clrMapOvr>
-  <p:timing>
-    <p:tnLst>
-      <p:par>
-        <p:cTn id="1" dur="indefinite" restart="never" nodeType="tmRoot"/>
-      </p:par>
-    </p:tnLst>
-  </p:timing>
-</p:sld>
-</file>
-
-<file path=ppt/slides/slide5.xml><?xml version="1.0" encoding="utf-8"?>
-<p:sld xmlns:a="http://schemas.openxmlformats.org/drawingml/2006/main" xmlns:r="http://schemas.openxmlformats.org/officeDocument/2006/relationships" xmlns:p="http://schemas.openxmlformats.org/presentationml/2006/main">
-  <p:cSld>
-    <p:spTree>
-      <p:nvGrpSpPr>
-        <p:cNvPr id="1" name=""/>
-        <p:cNvGrpSpPr/>
-        <p:nvPr/>
-      </p:nvGrpSpPr>
-      <p:grpSpPr>
-        <a:xfrm>
-          <a:off x="0" y="0"/>
-          <a:ext cx="0" cy="0"/>
-          <a:chOff x="0" y="0"/>
-          <a:chExt cx="0" cy="0"/>
-        </a:xfrm>
-      </p:grpSpPr>
-      <p:sp>
-        <p:nvSpPr>
-          <p:cNvPr id="2" name="제목 1"/>
-          <p:cNvSpPr>
-            <a:spLocks noGrp="1"/>
-          </p:cNvSpPr>
-          <p:nvPr>
-            <p:ph type="title"/>
-          </p:nvPr>
-        </p:nvSpPr>
-        <p:spPr/>
-        <p:txBody>
-          <a:bodyPr/>
-          <a:lstStyle/>
-          <a:p>
-            <a:r>
-              <a:rPr lang="ko-KR" altLang="en-US" smtClean="0"/>
-              <a:t>시뮬레이터</a:t>
-            </a:r>
-            <a:endParaRPr lang="ko-KR" altLang="en-US"/>
-          </a:p>
-        </p:txBody>
-      </p:sp>
-      <p:sp>
-        <p:nvSpPr>
-          <p:cNvPr id="3" name="내용 개체 틀 2"/>
-          <p:cNvSpPr>
-            <a:spLocks noGrp="1"/>
-          </p:cNvSpPr>
-          <p:nvPr>
-            <p:ph idx="1"/>
-          </p:nvPr>
-        </p:nvSpPr>
-        <p:spPr/>
-        <p:txBody>
-          <a:bodyPr/>
-          <a:lstStyle/>
-          <a:p>
-            <a:r>
-              <a:rPr lang="en-US" altLang="ko-KR" smtClean="0"/>
-              <a:t>‘</a:t>
-            </a:r>
-            <a:r>
-              <a:rPr lang="ko-KR" altLang="en-US" smtClean="0"/>
-              <a:t>몬스터 가져오기</a:t>
-            </a:r>
-            <a:r>
-              <a:rPr lang="en-US" altLang="ko-KR" smtClean="0"/>
-              <a:t>’ </a:t>
-            </a:r>
-            <a:r>
-              <a:rPr lang="ko-KR" altLang="en-US" smtClean="0"/>
-              <a:t>이름 관리자 추가</a:t>
-            </a:r>
-            <a:endParaRPr lang="en-US" altLang="ko-KR" smtClean="0"/>
-          </a:p>
-          <a:p>
-            <a:r>
-              <a:rPr lang="en-US" altLang="ko-KR" smtClean="0"/>
-              <a:t>INDEX</a:t>
-            </a:r>
-            <a:r>
-              <a:rPr lang="ko-KR" altLang="en-US" smtClean="0"/>
-              <a:t>와 </a:t>
-            </a:r>
-            <a:r>
-              <a:rPr lang="en-US" altLang="ko-KR" smtClean="0"/>
-              <a:t>MATCH </a:t>
-            </a:r>
-            <a:r>
-              <a:rPr lang="ko-KR" altLang="en-US" smtClean="0"/>
-              <a:t>함수 사용</a:t>
-            </a:r>
-            <a:endParaRPr lang="en-US" altLang="ko-KR" smtClean="0"/>
-          </a:p>
-          <a:p>
-            <a:endParaRPr lang="ko-KR" altLang="en-US"/>
-          </a:p>
-        </p:txBody>
-      </p:sp>
-      <p:pic>
-        <p:nvPicPr>
-          <p:cNvPr id="4" name="그림 3"/>
-          <p:cNvPicPr>
-            <a:picLocks noChangeAspect="1"/>
-          </p:cNvPicPr>
-          <p:nvPr/>
-        </p:nvPicPr>
-        <p:blipFill>
-          <a:blip r:embed="rId2"/>
-          <a:stretch>
-            <a:fillRect/>
-          </a:stretch>
-        </p:blipFill>
-        <p:spPr>
-          <a:xfrm>
-            <a:off x="5409253" y="3323732"/>
-            <a:ext cx="6782747" cy="3534268"/>
-          </a:xfrm>
-          <a:prstGeom prst="rect">
-            <a:avLst/>
-          </a:prstGeom>
-        </p:spPr>
-      </p:pic>
-    </p:spTree>
-    <p:extLst>
-      <p:ext uri="{BB962C8B-B14F-4D97-AF65-F5344CB8AC3E}">
-        <p14:creationId xmlns:p14="http://schemas.microsoft.com/office/powerpoint/2010/main" val="454332977"/>
-      </p:ext>
-    </p:extLst>
-  </p:cSld>
-  <p:clrMapOvr>
-    <a:masterClrMapping/>
-  </p:clrMapOvr>
-  <p:timing>
-    <p:tnLst>
-      <p:par>
-        <p:cTn id="1" dur="indefinite" restart="never" nodeType="tmRoot"/>
-      </p:par>
-    </p:tnLst>
-  </p:timing>
 </p:sld>
 </file>
 
@@ -3556,10 +3556,9 @@
           <a:lstStyle/>
           <a:p>
             <a:r>
-              <a:rPr lang="ko-KR" altLang="en-US" smtClean="0"/>
+              <a:rPr lang="ko-KR" altLang="en-US"/>
               <a:t>시뮬레이터</a:t>
             </a:r>
-            <a:endParaRPr lang="ko-KR" altLang="en-US"/>
           </a:p>
         </p:txBody>
       </p:sp>
@@ -3584,53 +3583,53 @@
           <a:lstStyle/>
           <a:p>
             <a:r>
-              <a:rPr lang="ko-KR" altLang="en-US" smtClean="0"/>
+              <a:rPr lang="ko-KR" altLang="en-US"/>
               <a:t>아무 이미지나 복붙해서 불러온 이미지가 보일 영역을 잡아준다</a:t>
             </a:r>
             <a:r>
-              <a:rPr lang="en-US" altLang="ko-KR" smtClean="0"/>
+              <a:rPr lang="en-US" altLang="ko-KR"/>
               <a:t>.</a:t>
             </a:r>
           </a:p>
           <a:p>
             <a:r>
-              <a:rPr lang="ko-KR" altLang="en-US" smtClean="0"/>
+              <a:rPr lang="ko-KR" altLang="en-US"/>
               <a:t>이미지를 우클릭해서 </a:t>
             </a:r>
             <a:r>
-              <a:rPr lang="en-US" altLang="ko-KR" smtClean="0"/>
+              <a:rPr lang="en-US" altLang="ko-KR"/>
               <a:t>‘=</a:t>
             </a:r>
             <a:r>
-              <a:rPr lang="ko-KR" altLang="en-US" smtClean="0"/>
+              <a:rPr lang="ko-KR" altLang="en-US"/>
               <a:t>몬스터</a:t>
             </a:r>
             <a:r>
-              <a:rPr lang="en-US" altLang="ko-KR" smtClean="0"/>
+              <a:rPr lang="en-US" altLang="ko-KR"/>
               <a:t>_</a:t>
             </a:r>
             <a:r>
-              <a:rPr lang="ko-KR" altLang="en-US" smtClean="0"/>
+              <a:rPr lang="ko-KR" altLang="en-US"/>
               <a:t>가져오기</a:t>
             </a:r>
             <a:r>
-              <a:rPr lang="en-US" altLang="ko-KR" smtClean="0"/>
+              <a:rPr lang="en-US" altLang="ko-KR"/>
               <a:t>’</a:t>
             </a:r>
             <a:r>
-              <a:rPr lang="ko-KR" altLang="en-US" smtClean="0"/>
+              <a:rPr lang="ko-KR" altLang="en-US"/>
               <a:t>를 적고 엔터 치면</a:t>
             </a:r>
             <a:r>
-              <a:rPr lang="en-US" altLang="ko-KR" smtClean="0"/>
+              <a:rPr lang="en-US" altLang="ko-KR"/>
               <a:t>, </a:t>
             </a:r>
             <a:r>
-              <a:rPr lang="ko-KR" altLang="en-US" smtClean="0"/>
+              <a:rPr lang="ko-KR" altLang="en-US"/>
               <a:t>몬스터 이름을 선택할 때마다 몬스터 이미지가 해당 몬스터 이미지로 바뀜</a:t>
             </a:r>
             <a:r>
-              <a:rPr lang="en-US" altLang="ko-KR" smtClean="0"/>
+              <a:rPr lang="en-US" altLang="ko-KR"/>
               <a:t>.</a:t>
             </a:r>
           </a:p>
@@ -3673,13 +3672,6 @@
   <p:clrMapOvr>
     <a:masterClrMapping/>
   </p:clrMapOvr>
-  <p:timing>
-    <p:tnLst>
-      <p:par>
-        <p:cTn id="1" dur="indefinite" restart="never" nodeType="tmRoot"/>
-      </p:par>
-    </p:tnLst>
-  </p:timing>
 </p:sld>
 </file>
 
@@ -3770,14 +3762,13 @@
           <a:lstStyle/>
           <a:p>
             <a:r>
-              <a:rPr lang="en-US" altLang="ko-KR" smtClean="0"/>
+              <a:rPr lang="en-US" altLang="ko-KR"/>
               <a:t>VLOOKUP </a:t>
             </a:r>
             <a:r>
-              <a:rPr lang="ko-KR" altLang="en-US" smtClean="0"/>
+              <a:rPr lang="ko-KR" altLang="en-US"/>
               <a:t>함수</a:t>
             </a:r>
-            <a:endParaRPr lang="ko-KR" altLang="en-US"/>
           </a:p>
         </p:txBody>
       </p:sp>
